--- a/decks/humansinaievals.pptx
+++ b/decks/humansinaievals.pptx
@@ -5636,8 +5636,8 @@
         </p:nvSpPr>
         <p:spPr>
           <a:xfrm>
-            <a:off x="548640" y="411480"/>
-            <a:ext cx="11064240" cy="777240"/>
+            <a:off x="548640" y="457200"/>
+            <a:ext cx="11064240" cy="1188720"/>
           </a:xfrm>
           <a:prstGeom prst="rect">
             <a:avLst/>
@@ -5683,7 +5683,7 @@
         </p:blipFill>
         <p:spPr>
           <a:xfrm>
-            <a:off x="566928" y="1371600"/>
+            <a:off x="566928" y="1700784"/>
             <a:ext cx="6903720" cy="4663440"/>
           </a:xfrm>
           <a:prstGeom prst="rect">
@@ -5699,7 +5699,7 @@
         </p:nvSpPr>
         <p:spPr>
           <a:xfrm>
-            <a:off x="7726680" y="1371600"/>
+            <a:off x="7726680" y="1700784"/>
             <a:ext cx="3904488" cy="4663440"/>
           </a:xfrm>
           <a:prstGeom prst="roundRect">
@@ -5726,7 +5726,7 @@
         </p:nvSpPr>
         <p:spPr>
           <a:xfrm>
-            <a:off x="8019288" y="1600200"/>
+            <a:off x="8019288" y="1929384"/>
             <a:ext cx="3319272" cy="320040"/>
           </a:xfrm>
           <a:prstGeom prst="rect">
@@ -5765,7 +5765,7 @@
         </p:nvSpPr>
         <p:spPr>
           <a:xfrm>
-            <a:off x="8019288" y="1938528"/>
+            <a:off x="8019288" y="2267712"/>
             <a:ext cx="3319272" cy="914400"/>
           </a:xfrm>
           <a:prstGeom prst="rect">
@@ -5807,7 +5807,7 @@
         </p:nvSpPr>
         <p:spPr>
           <a:xfrm>
-            <a:off x="8019288" y="2926080"/>
+            <a:off x="8019288" y="3255264"/>
             <a:ext cx="3319272" cy="320040"/>
           </a:xfrm>
           <a:prstGeom prst="rect">
@@ -5846,7 +5846,7 @@
         </p:nvSpPr>
         <p:spPr>
           <a:xfrm>
-            <a:off x="8019288" y="3264408"/>
+            <a:off x="8019288" y="3593592"/>
             <a:ext cx="3319272" cy="1965960"/>
           </a:xfrm>
           <a:prstGeom prst="rect">
@@ -5937,7 +5937,7 @@
         </p:nvSpPr>
         <p:spPr>
           <a:xfrm>
-            <a:off x="8019288" y="5212080"/>
+            <a:off x="8019288" y="5541264"/>
             <a:ext cx="3319272" cy="365760"/>
           </a:xfrm>
           <a:prstGeom prst="rect">
@@ -5976,7 +5976,7 @@
         </p:nvSpPr>
         <p:spPr>
           <a:xfrm>
-            <a:off x="8019288" y="5541264"/>
+            <a:off x="8019288" y="5870448"/>
             <a:ext cx="3319272" cy="457200"/>
           </a:xfrm>
           <a:prstGeom prst="rect">
